--- a/ゲーム科3年/00_前期/ゲームエンジンⅤ/17_ゲーム制作課題.pptx
+++ b/ゲーム科3年/00_前期/ゲームエンジンⅤ/17_ゲーム制作課題.pptx
@@ -259,7 +259,7 @@
           <a:p>
             <a:fld id="{E9CC885B-4903-4D54-9A93-00025F12DED9}" type="datetimeFigureOut">
               <a:rPr kumimoji="1" lang="ja-JP" altLang="en-US" smtClean="0"/>
-              <a:t>2025/2/28</a:t>
+              <a:t>2026/3/26</a:t>
             </a:fld>
             <a:endParaRPr kumimoji="1" lang="ja-JP" altLang="en-US"/>
           </a:p>
@@ -489,7 +489,7 @@
           <a:p>
             <a:fld id="{E9CC885B-4903-4D54-9A93-00025F12DED9}" type="datetimeFigureOut">
               <a:rPr kumimoji="1" lang="ja-JP" altLang="en-US" smtClean="0"/>
-              <a:t>2025/2/28</a:t>
+              <a:t>2026/3/26</a:t>
             </a:fld>
             <a:endParaRPr kumimoji="1" lang="ja-JP" altLang="en-US"/>
           </a:p>
@@ -729,7 +729,7 @@
           <a:p>
             <a:fld id="{E9CC885B-4903-4D54-9A93-00025F12DED9}" type="datetimeFigureOut">
               <a:rPr kumimoji="1" lang="ja-JP" altLang="en-US" smtClean="0"/>
-              <a:t>2025/2/28</a:t>
+              <a:t>2026/3/26</a:t>
             </a:fld>
             <a:endParaRPr kumimoji="1" lang="ja-JP" altLang="en-US"/>
           </a:p>
@@ -959,7 +959,7 @@
           <a:p>
             <a:fld id="{E9CC885B-4903-4D54-9A93-00025F12DED9}" type="datetimeFigureOut">
               <a:rPr kumimoji="1" lang="ja-JP" altLang="en-US" smtClean="0"/>
-              <a:t>2025/2/28</a:t>
+              <a:t>2026/3/26</a:t>
             </a:fld>
             <a:endParaRPr kumimoji="1" lang="ja-JP" altLang="en-US"/>
           </a:p>
@@ -1234,7 +1234,7 @@
           <a:p>
             <a:fld id="{E9CC885B-4903-4D54-9A93-00025F12DED9}" type="datetimeFigureOut">
               <a:rPr kumimoji="1" lang="ja-JP" altLang="en-US" smtClean="0"/>
-              <a:t>2025/2/28</a:t>
+              <a:t>2026/3/26</a:t>
             </a:fld>
             <a:endParaRPr kumimoji="1" lang="ja-JP" altLang="en-US"/>
           </a:p>
@@ -1563,7 +1563,7 @@
           <a:p>
             <a:fld id="{E9CC885B-4903-4D54-9A93-00025F12DED9}" type="datetimeFigureOut">
               <a:rPr kumimoji="1" lang="ja-JP" altLang="en-US" smtClean="0"/>
-              <a:t>2025/2/28</a:t>
+              <a:t>2026/3/26</a:t>
             </a:fld>
             <a:endParaRPr kumimoji="1" lang="ja-JP" altLang="en-US"/>
           </a:p>
@@ -2039,7 +2039,7 @@
           <a:p>
             <a:fld id="{E9CC885B-4903-4D54-9A93-00025F12DED9}" type="datetimeFigureOut">
               <a:rPr kumimoji="1" lang="ja-JP" altLang="en-US" smtClean="0"/>
-              <a:t>2025/2/28</a:t>
+              <a:t>2026/3/26</a:t>
             </a:fld>
             <a:endParaRPr kumimoji="1" lang="ja-JP" altLang="en-US"/>
           </a:p>
@@ -2180,7 +2180,7 @@
           <a:p>
             <a:fld id="{E9CC885B-4903-4D54-9A93-00025F12DED9}" type="datetimeFigureOut">
               <a:rPr kumimoji="1" lang="ja-JP" altLang="en-US" smtClean="0"/>
-              <a:t>2025/2/28</a:t>
+              <a:t>2026/3/26</a:t>
             </a:fld>
             <a:endParaRPr kumimoji="1" lang="ja-JP" altLang="en-US"/>
           </a:p>
@@ -2293,7 +2293,7 @@
           <a:p>
             <a:fld id="{E9CC885B-4903-4D54-9A93-00025F12DED9}" type="datetimeFigureOut">
               <a:rPr kumimoji="1" lang="ja-JP" altLang="en-US" smtClean="0"/>
-              <a:t>2025/2/28</a:t>
+              <a:t>2026/3/26</a:t>
             </a:fld>
             <a:endParaRPr kumimoji="1" lang="ja-JP" altLang="en-US"/>
           </a:p>
@@ -2636,7 +2636,7 @@
           <a:p>
             <a:fld id="{E9CC885B-4903-4D54-9A93-00025F12DED9}" type="datetimeFigureOut">
               <a:rPr kumimoji="1" lang="ja-JP" altLang="en-US" smtClean="0"/>
-              <a:t>2025/2/28</a:t>
+              <a:t>2026/3/26</a:t>
             </a:fld>
             <a:endParaRPr kumimoji="1" lang="ja-JP" altLang="en-US"/>
           </a:p>
@@ -2924,7 +2924,7 @@
           <a:p>
             <a:fld id="{E9CC885B-4903-4D54-9A93-00025F12DED9}" type="datetimeFigureOut">
               <a:rPr kumimoji="1" lang="ja-JP" altLang="en-US" smtClean="0"/>
-              <a:t>2025/2/28</a:t>
+              <a:t>2026/3/26</a:t>
             </a:fld>
             <a:endParaRPr kumimoji="1" lang="ja-JP" altLang="en-US"/>
           </a:p>
@@ -3197,7 +3197,7 @@
           <a:p>
             <a:fld id="{E9CC885B-4903-4D54-9A93-00025F12DED9}" type="datetimeFigureOut">
               <a:rPr kumimoji="1" lang="ja-JP" altLang="en-US" smtClean="0"/>
-              <a:t>2025/2/28</a:t>
+              <a:t>2026/3/26</a:t>
             </a:fld>
             <a:endParaRPr kumimoji="1" lang="ja-JP" altLang="en-US"/>
           </a:p>
@@ -3664,7 +3664,7 @@
         <p:spPr>
           <a:xfrm>
             <a:off x="567542" y="1216429"/>
-            <a:ext cx="2339102" cy="461665"/>
+            <a:ext cx="11549957" cy="3785652"/>
           </a:xfrm>
           <a:prstGeom prst="rect">
             <a:avLst/>
@@ -3678,8 +3678,87 @@
           <a:lstStyle/>
           <a:p>
             <a:r>
-              <a:rPr kumimoji="1" lang="ja-JP" altLang="en-US" sz="2400"/>
-              <a:t>ゲーム制作課題</a:t>
+              <a:rPr kumimoji="1" lang="ja-JP" altLang="en-US" sz="2400" dirty="0"/>
+              <a:t>これまで学習したことを活かして簡単なゲームを作りましょう。</a:t>
+            </a:r>
+            <a:endParaRPr kumimoji="1" lang="en-US" altLang="ja-JP" sz="2400" dirty="0"/>
+          </a:p>
+          <a:p>
+            <a:r>
+              <a:rPr lang="ja-JP" altLang="en-US" sz="2400" dirty="0"/>
+              <a:t>期間は短いので、小規模のもので大丈夫ですが、</a:t>
+            </a:r>
+            <a:endParaRPr lang="en-US" altLang="ja-JP" sz="2400" dirty="0"/>
+          </a:p>
+          <a:p>
+            <a:r>
+              <a:rPr kumimoji="1" lang="ja-JP" altLang="en-US" sz="2400" dirty="0"/>
+              <a:t>以下の要素は必ず実装してください。</a:t>
+            </a:r>
+            <a:endParaRPr kumimoji="1" lang="en-US" altLang="ja-JP" sz="2400" dirty="0"/>
+          </a:p>
+          <a:p>
+            <a:endParaRPr lang="en-US" altLang="ja-JP" sz="2400" dirty="0"/>
+          </a:p>
+          <a:p>
+            <a:r>
+              <a:rPr kumimoji="1" lang="ja-JP" altLang="en-US" sz="2400" b="1" dirty="0">
+                <a:solidFill>
+                  <a:srgbClr val="FF0000"/>
+                </a:solidFill>
+              </a:rPr>
+              <a:t>■実装すること</a:t>
+            </a:r>
+            <a:endParaRPr kumimoji="1" lang="en-US" altLang="ja-JP" sz="2400" b="1" dirty="0">
+              <a:solidFill>
+                <a:srgbClr val="FF0000"/>
+              </a:solidFill>
+            </a:endParaRPr>
+          </a:p>
+          <a:p>
+            <a:r>
+              <a:rPr lang="ja-JP" altLang="en-US" sz="2400" dirty="0"/>
+              <a:t>・画面遷移</a:t>
+            </a:r>
+            <a:endParaRPr kumimoji="1" lang="en-US" altLang="ja-JP" sz="2400" dirty="0"/>
+          </a:p>
+          <a:p>
+            <a:r>
+              <a:rPr lang="ja-JP" altLang="en-US" sz="2400" dirty="0"/>
+              <a:t>　・タイトル画面→プレイ画面→クリア画面</a:t>
+            </a:r>
+            <a:r>
+              <a:rPr lang="en-US" altLang="ja-JP" sz="2400" dirty="0"/>
+              <a:t>or</a:t>
+            </a:r>
+            <a:r>
+              <a:rPr lang="ja-JP" altLang="en-US" sz="2400" dirty="0"/>
+              <a:t>ゲームオーバー画面→タイトル画面</a:t>
+            </a:r>
+            <a:endParaRPr lang="en-US" altLang="ja-JP" sz="2400" dirty="0"/>
+          </a:p>
+          <a:p>
+            <a:endParaRPr kumimoji="1" lang="en-US" altLang="ja-JP" sz="2400" dirty="0"/>
+          </a:p>
+          <a:p>
+            <a:r>
+              <a:rPr kumimoji="1" lang="ja-JP" altLang="en-US" sz="2400" dirty="0"/>
+              <a:t>・ナイアガラエフェクト</a:t>
+            </a:r>
+            <a:endParaRPr kumimoji="1" lang="en-US" altLang="ja-JP" sz="2400" dirty="0"/>
+          </a:p>
+          <a:p>
+            <a:r>
+              <a:rPr kumimoji="1" lang="ja-JP" altLang="en-US" sz="2400" dirty="0"/>
+              <a:t>・</a:t>
+            </a:r>
+            <a:r>
+              <a:rPr kumimoji="1" lang="en-US" altLang="ja-JP" sz="2400" dirty="0"/>
+              <a:t>UI</a:t>
+            </a:r>
+            <a:r>
+              <a:rPr kumimoji="1" lang="ja-JP" altLang="en-US" sz="2400" dirty="0"/>
+              <a:t>ウィジェット</a:t>
             </a:r>
             <a:endParaRPr kumimoji="1" lang="en-US" altLang="ja-JP" sz="2400" dirty="0"/>
           </a:p>
